--- a/data/employees/EMP008/AST-EMP008-01.pptx
+++ b/data/employees/EMP008/AST-EMP008-01.pptx
@@ -9,6 +9,7 @@
     <p:sldId id="257" r:id="rId8"/>
     <p:sldId id="258" r:id="rId9"/>
     <p:sldId id="259" r:id="rId10"/>
+    <p:sldId id="260" r:id="rId11"/>
   </p:sldIdLst>
   <p:sldSz cx="9144000" cy="6858000" type="screen4x3"/>
   <p:notesSz cx="6858000" cy="9144000"/>
@@ -3098,42 +3099,55 @@
             <a:spLocks noGrp="1"/>
           </p:cNvSpPr>
           <p:nvPr>
-            <p:ph type="ctrTitle"/>
-          </p:nvPr>
-        </p:nvSpPr>
-        <p:spPr/>
-        <p:txBody>
-          <a:bodyPr/>
-          <a:lstStyle/>
-          <a:p>
-            <a:r>
-              <a:t>Project update deck - EMP008</a:t>
-            </a:r>
-          </a:p>
-        </p:txBody>
-      </p:sp>
-      <p:sp>
-        <p:nvSpPr>
-          <p:cNvPr id="3" name="Subtitle 2"/>
-          <p:cNvSpPr>
-            <a:spLocks noGrp="1"/>
-          </p:cNvSpPr>
-          <p:nvPr>
-            <p:ph type="subTitle" idx="1"/>
-          </p:nvPr>
-        </p:nvSpPr>
-        <p:spPr/>
-        <p:txBody>
-          <a:bodyPr/>
-          <a:lstStyle/>
-          <a:p>
-            <a:r>
-              <a:t>Jamie Brown | Engineer | Engineering</a:t>
-            </a:r>
-          </a:p>
-          <a:p>
-            <a:r>
-              <a:t>Prepared: 2025-01-10</a:t>
+            <p:ph type="title"/>
+          </p:nvPr>
+        </p:nvSpPr>
+        <p:spPr/>
+        <p:txBody>
+          <a:bodyPr/>
+          <a:lstStyle/>
+          <a:p>
+            <a:r>
+              <a:t>Ast Emp008 01 - EMP008</a:t>
+            </a:r>
+          </a:p>
+        </p:txBody>
+      </p:sp>
+      <p:sp>
+        <p:nvSpPr>
+          <p:cNvPr id="3" name="Content Placeholder 2"/>
+          <p:cNvSpPr>
+            <a:spLocks noGrp="1"/>
+          </p:cNvSpPr>
+          <p:nvPr>
+            <p:ph idx="1"/>
+          </p:nvPr>
+        </p:nvSpPr>
+        <p:spPr/>
+        <p:txBody>
+          <a:bodyPr/>
+          <a:lstStyle/>
+          <a:p>
+            <a:r>
+              <a:t>Slide 1: Executive Summary</a:t>
+            </a:r>
+          </a:p>
+          <a:p>
+            <a:pPr lvl="1"/>
+            <a:r>
+              <a:t>Section 1: Quarterly delivery milestones. EMP008 contributes to ast emp008 01 through recurring collaboration, clear ownership boundaries, and measurable outcomes. The team captures decisions, open issues, and handoffs so that knowledge remains discoverable for future programs.</a:t>
+            </a:r>
+          </a:p>
+          <a:p>
+            <a:pPr lvl="1"/>
+            <a:r>
+              <a:t>Section 2: Quarterly delivery milestones. EMP008 contributes to ast emp008 01 through recurring collaboration, clear ownership boundaries, and measurable outcomes. The team captures decisions, open issues, and handoffs so that knowledge remains discoverable for future programs.</a:t>
+            </a:r>
+          </a:p>
+          <a:p>
+            <a:pPr lvl="1"/>
+            <a:r>
+              <a:t>Section 3: Automation backlog refinement. EMP008 contributes to ast emp008 01 through recurring collaboration, clear ownership boundaries, and measurable outcomes. The team captures decisions, open issues, and handoffs so that knowledge remains discoverable for future programs.</a:t>
             </a:r>
           </a:p>
         </p:txBody>
@@ -3172,7 +3186,7 @@
           <a:lstStyle/>
           <a:p>
             <a:r>
-              <a:t>Sprint Velocity Trends</a:t>
+              <a:t>Ast Emp008 01 - EMP008</a:t>
             </a:r>
           </a:p>
         </p:txBody>
@@ -3193,17 +3207,25 @@
           <a:lstStyle/>
           <a:p>
             <a:r>
-              <a:t>Overview of Sprint Velocity Trends for Engineering department.</a:t>
-            </a:r>
-          </a:p>
-          <a:p>
-            <a:r>
-              <a:t>Responsible: Jamie Brown (Engineer)</a:t>
-            </a:r>
-          </a:p>
-          <a:p>
-            <a:r>
-              <a:t>Location: Austin | Skills: SQL, Kusto, Synapse, Fabric</a:t>
+              <a:t>Slide 2: Executive Summary</a:t>
+            </a:r>
+          </a:p>
+          <a:p>
+            <a:pPr lvl="1"/>
+            <a:r>
+              <a:t>Section 1: Customer escalation analysis. EMP008 contributes to ast emp008 01 through recurring collaboration, clear ownership boundaries, and measurable outcomes. The team captures decisions, open issues, and handoffs so that knowledge remains discoverable for future programs.</a:t>
+            </a:r>
+          </a:p>
+          <a:p>
+            <a:pPr lvl="1"/>
+            <a:r>
+              <a:t>Section 2: Quarterly delivery milestones. EMP008 contributes to ast emp008 01 through recurring collaboration, clear ownership boundaries, and measurable outcomes. The team captures decisions, open issues, and handoffs so that knowledge remains discoverable for future programs.</a:t>
+            </a:r>
+          </a:p>
+          <a:p>
+            <a:pPr lvl="1"/>
+            <a:r>
+              <a:t>Section 3: Knowledge transfer and onboarding. EMP008 contributes to ast emp008 01 through recurring collaboration, clear ownership boundaries, and measurable outcomes. The team captures decisions, open issues, and handoffs so that knowledge remains discoverable for future programs.</a:t>
             </a:r>
           </a:p>
         </p:txBody>
@@ -3242,7 +3264,7 @@
           <a:lstStyle/>
           <a:p>
             <a:r>
-              <a:t>Technical Debt Dashboard</a:t>
+              <a:t>Ast Emp008 01 - EMP008</a:t>
             </a:r>
           </a:p>
         </p:txBody>
@@ -3263,17 +3285,25 @@
           <a:lstStyle/>
           <a:p>
             <a:r>
-              <a:t>Overview of Technical Debt Dashboard for Engineering department.</a:t>
-            </a:r>
-          </a:p>
-          <a:p>
-            <a:r>
-              <a:t>Responsible: Jamie Brown (Engineer)</a:t>
-            </a:r>
-          </a:p>
-          <a:p>
-            <a:r>
-              <a:t>Location: Austin | Skills: SQL, Kusto, Synapse, Fabric</a:t>
+              <a:t>Slide 3: Executive Summary</a:t>
+            </a:r>
+          </a:p>
+          <a:p>
+            <a:pPr lvl="1"/>
+            <a:r>
+              <a:t>Section 1: Quarterly delivery milestones. EMP008 contributes to ast emp008 01 through recurring collaboration, clear ownership boundaries, and measurable outcomes. The team captures decisions, open issues, and handoffs so that knowledge remains discoverable for future programs.</a:t>
+            </a:r>
+          </a:p>
+          <a:p>
+            <a:pPr lvl="1"/>
+            <a:r>
+              <a:t>Section 2: Fabric semantic model planning. EMP008 contributes to ast emp008 01 through recurring collaboration, clear ownership boundaries, and measurable outcomes. The team captures decisions, open issues, and handoffs so that knowledge remains discoverable for future programs.</a:t>
+            </a:r>
+          </a:p>
+          <a:p>
+            <a:pPr lvl="1"/>
+            <a:r>
+              <a:t>Section 3: Operational risk review. EMP008 contributes to ast emp008 01 through recurring collaboration, clear ownership boundaries, and measurable outcomes. The team captures decisions, open issues, and handoffs so that knowledge remains discoverable for future programs.</a:t>
             </a:r>
           </a:p>
         </p:txBody>
@@ -3312,7 +3342,7 @@
           <a:lstStyle/>
           <a:p>
             <a:r>
-              <a:t>Architecture Review Outcomes</a:t>
+              <a:t>Ast Emp008 01 - EMP008</a:t>
             </a:r>
           </a:p>
         </p:txBody>
@@ -3333,17 +3363,103 @@
           <a:lstStyle/>
           <a:p>
             <a:r>
-              <a:t>Overview of Architecture Review Outcomes for Engineering department.</a:t>
-            </a:r>
-          </a:p>
-          <a:p>
-            <a:r>
-              <a:t>Responsible: Jamie Brown (Engineer)</a:t>
-            </a:r>
-          </a:p>
-          <a:p>
-            <a:r>
-              <a:t>Location: Austin | Skills: SQL, Kusto, Synapse, Fabric</a:t>
+              <a:t>Slide 4: Executive Summary</a:t>
+            </a:r>
+          </a:p>
+          <a:p>
+            <a:pPr lvl="1"/>
+            <a:r>
+              <a:t>Section 1: Operational risk review. EMP008 contributes to ast emp008 01 through recurring collaboration, clear ownership boundaries, and measurable outcomes. The team captures decisions, open issues, and handoffs so that knowledge remains discoverable for future programs.</a:t>
+            </a:r>
+          </a:p>
+          <a:p>
+            <a:pPr lvl="1"/>
+            <a:r>
+              <a:t>Section 2: Fabric semantic model planning. EMP008 contributes to ast emp008 01 through recurring collaboration, clear ownership boundaries, and measurable outcomes. The team captures decisions, open issues, and handoffs so that knowledge remains discoverable for future programs.</a:t>
+            </a:r>
+          </a:p>
+          <a:p>
+            <a:pPr lvl="1"/>
+            <a:r>
+              <a:t>Section 3: Customer escalation analysis. EMP008 contributes to ast emp008 01 through recurring collaboration, clear ownership boundaries, and measurable outcomes. The team captures decisions, open issues, and handoffs so that knowledge remains discoverable for future programs.</a:t>
+            </a:r>
+          </a:p>
+        </p:txBody>
+      </p:sp>
+    </p:spTree>
+  </p:cSld>
+  <p:clrMapOvr>
+    <a:masterClrMapping/>
+  </p:clrMapOvr>
+</p:sld>
+</file>
+
+<file path=ppt/slides/slide5.xml><?xml version="1.0" encoding="utf-8"?>
+<p:sld xmlns:a="http://schemas.openxmlformats.org/drawingml/2006/main" xmlns:p="http://schemas.openxmlformats.org/presentationml/2006/main" xmlns:r="http://schemas.openxmlformats.org/officeDocument/2006/relationships">
+  <p:cSld>
+    <p:spTree>
+      <p:nvGrpSpPr>
+        <p:cNvPr id="1" name=""/>
+        <p:cNvGrpSpPr/>
+        <p:nvPr/>
+      </p:nvGrpSpPr>
+      <p:grpSpPr/>
+      <p:sp>
+        <p:nvSpPr>
+          <p:cNvPr id="2" name="Title 1"/>
+          <p:cNvSpPr>
+            <a:spLocks noGrp="1"/>
+          </p:cNvSpPr>
+          <p:nvPr>
+            <p:ph type="title"/>
+          </p:nvPr>
+        </p:nvSpPr>
+        <p:spPr/>
+        <p:txBody>
+          <a:bodyPr/>
+          <a:lstStyle/>
+          <a:p>
+            <a:r>
+              <a:t>Ast Emp008 01 - EMP008</a:t>
+            </a:r>
+          </a:p>
+        </p:txBody>
+      </p:sp>
+      <p:sp>
+        <p:nvSpPr>
+          <p:cNvPr id="3" name="Content Placeholder 2"/>
+          <p:cNvSpPr>
+            <a:spLocks noGrp="1"/>
+          </p:cNvSpPr>
+          <p:nvPr>
+            <p:ph idx="1"/>
+          </p:nvPr>
+        </p:nvSpPr>
+        <p:spPr/>
+        <p:txBody>
+          <a:bodyPr/>
+          <a:lstStyle/>
+          <a:p>
+            <a:r>
+              <a:t>Slide 5: Executive Summary</a:t>
+            </a:r>
+          </a:p>
+          <a:p>
+            <a:pPr lvl="1"/>
+            <a:r>
+              <a:t>Section 1: Customer escalation analysis. EMP008 contributes to ast emp008 01 through recurring collaboration, clear ownership boundaries, and measurable outcomes. The team captures decisions, open issues, and handoffs so that knowledge remains discoverable for future programs.</a:t>
+            </a:r>
+          </a:p>
+          <a:p>
+            <a:pPr lvl="1"/>
+            <a:r>
+              <a:t>Section 2: Operational risk review. EMP008 contributes to ast emp008 01 through recurring collaboration, clear ownership boundaries, and measurable outcomes. The team captures decisions, open issues, and handoffs so that knowledge remains discoverable for future programs.</a:t>
+            </a:r>
+          </a:p>
+          <a:p>
+            <a:pPr lvl="1"/>
+            <a:r>
+              <a:t>Section 3: Operational risk review. EMP008 contributes to ast emp008 01 through recurring collaboration, clear ownership boundaries, and measurable outcomes. The team captures decisions, open issues, and handoffs so that knowledge remains discoverable for future programs.</a:t>
             </a:r>
           </a:p>
         </p:txBody>
